--- a/inlustro-project (2).pptx
+++ b/inlustro-project (2).pptx
@@ -22,27 +22,15 @@
   <p:notesSz cx="6858000" cy="9144000"/>
   <p:embeddedFontLst>
     <p:embeddedFont>
-      <p:font typeface="Calibri" panose="020F0502020204030204" pitchFamily="34" charset="0"/>
+      <p:font typeface="Righteous" panose="020B0604020202020204" charset="0"/>
       <p:regular r:id="rId12"/>
-      <p:bold r:id="rId13"/>
-      <p:italic r:id="rId14"/>
-      <p:boldItalic r:id="rId15"/>
-    </p:embeddedFont>
-    <p:embeddedFont>
-      <p:font typeface="Calibri Light" panose="020F0302020204030204" pitchFamily="34" charset="0"/>
-      <p:regular r:id="rId16"/>
-      <p:italic r:id="rId17"/>
-    </p:embeddedFont>
-    <p:embeddedFont>
-      <p:font typeface="Righteous" panose="020B0604020202020204" charset="0"/>
-      <p:regular r:id="rId18"/>
     </p:embeddedFont>
     <p:embeddedFont>
       <p:font typeface="Roboto" panose="02000000000000000000" pitchFamily="2" charset="0"/>
-      <p:regular r:id="rId19"/>
-      <p:bold r:id="rId20"/>
-      <p:italic r:id="rId21"/>
-      <p:boldItalic r:id="rId22"/>
+      <p:regular r:id="rId13"/>
+      <p:bold r:id="rId14"/>
+      <p:italic r:id="rId15"/>
+      <p:boldItalic r:id="rId16"/>
     </p:embeddedFont>
   </p:embeddedFontLst>
   <p:defaultTextStyle>
@@ -9383,7 +9371,7 @@
           <a:p>
             <a:fld id="{4BDF68E2-58F2-4D09-BE8B-E3BD06533059}" type="datetimeFigureOut">
               <a:rPr lang="en-US" smtClean="0"/>
-              <a:t>5/19/2023</a:t>
+              <a:t>2/11/2026</a:t>
             </a:fld>
             <a:endParaRPr lang="en-US" dirty="0"/>
           </a:p>
@@ -9592,7 +9580,7 @@
           <a:p>
             <a:fld id="{2E2D6473-DF6D-4702-B328-E0DD40540A4E}" type="datetimeFigureOut">
               <a:rPr lang="en-US" smtClean="0"/>
-              <a:t>5/19/2023</a:t>
+              <a:t>2/11/2026</a:t>
             </a:fld>
             <a:endParaRPr lang="en-US" dirty="0"/>
           </a:p>
@@ -9851,7 +9839,7 @@
           <a:p>
             <a:fld id="{E26F7E3A-B166-407D-9866-32884E7D5B37}" type="datetimeFigureOut">
               <a:rPr lang="en-US" smtClean="0"/>
-              <a:t>5/19/2023</a:t>
+              <a:t>2/11/2026</a:t>
             </a:fld>
             <a:endParaRPr lang="en-US" dirty="0"/>
           </a:p>
@@ -11465,7 +11453,7 @@
           <a:p>
             <a:fld id="{528FC5F6-F338-4AE4-BB23-26385BCFC423}" type="datetimeFigureOut">
               <a:rPr lang="en-US" smtClean="0"/>
-              <a:t>5/19/2023</a:t>
+              <a:t>2/11/2026</a:t>
             </a:fld>
             <a:endParaRPr lang="en-US" dirty="0"/>
           </a:p>
@@ -11803,7 +11791,7 @@
           <a:p>
             <a:fld id="{20EBB0C4-6273-4C6E-B9BD-2EDC30F1CD52}" type="datetimeFigureOut">
               <a:rPr lang="en-US" smtClean="0"/>
-              <a:t>5/19/2023</a:t>
+              <a:t>2/11/2026</a:t>
             </a:fld>
             <a:endParaRPr lang="en-US" dirty="0"/>
           </a:p>
@@ -12079,7 +12067,7 @@
           <a:p>
             <a:fld id="{19AB4D41-86C1-4908-B66A-0B50CEB3BF29}" type="datetimeFigureOut">
               <a:rPr lang="en-US" smtClean="0"/>
-              <a:t>5/19/2023</a:t>
+              <a:t>2/11/2026</a:t>
             </a:fld>
             <a:endParaRPr lang="en-US" dirty="0"/>
           </a:p>
@@ -12459,7 +12447,7 @@
           <a:p>
             <a:fld id="{E6426E2C-56C1-4E0D-A793-0088A7FDD37E}" type="datetimeFigureOut">
               <a:rPr lang="en-US" smtClean="0"/>
-              <a:t>5/19/2023</a:t>
+              <a:t>2/11/2026</a:t>
             </a:fld>
             <a:endParaRPr lang="en-US" dirty="0"/>
           </a:p>
@@ -12578,7 +12566,7 @@
           <a:p>
             <a:fld id="{C8C39B41-D8B5-4052-B551-9B5525EAA8B6}" type="datetimeFigureOut">
               <a:rPr lang="en-US" smtClean="0"/>
-              <a:t>5/19/2023</a:t>
+              <a:t>2/11/2026</a:t>
             </a:fld>
             <a:endParaRPr lang="en-US" dirty="0"/>
           </a:p>
@@ -12752,7 +12740,7 @@
           <a:p>
             <a:fld id="{4D94136C-8742-45B2-AF27-D93DF72833A9}" type="datetimeFigureOut">
               <a:rPr lang="en-US" smtClean="0"/>
-              <a:t>5/19/2023</a:t>
+              <a:t>2/11/2026</a:t>
             </a:fld>
             <a:endParaRPr lang="en-US" dirty="0"/>
           </a:p>
@@ -13109,7 +13097,7 @@
           <a:p>
             <a:fld id="{32ABBEA6-7C60-4B02-AE87-00D78D8422AF}" type="datetimeFigureOut">
               <a:rPr lang="en-US" smtClean="0"/>
-              <a:t>5/19/2023</a:t>
+              <a:t>2/11/2026</a:t>
             </a:fld>
             <a:endParaRPr lang="en-US" dirty="0"/>
           </a:p>
@@ -13490,7 +13478,7 @@
           <a:p>
             <a:fld id="{C9CAD897-D46E-4AD2-BD9B-49DD3E640873}" type="datetimeFigureOut">
               <a:rPr lang="en-US" smtClean="0"/>
-              <a:t>5/19/2023</a:t>
+              <a:t>2/11/2026</a:t>
             </a:fld>
             <a:endParaRPr lang="en-US" dirty="0"/>
           </a:p>
@@ -13780,7 +13768,7 @@
           <a:p>
             <a:fld id="{98624D31-43A5-475A-80CF-332C9F6DCF35}" type="datetimeFigureOut">
               <a:rPr lang="en-US" smtClean="0"/>
-              <a:t>5/19/2023</a:t>
+              <a:t>2/11/2026</a:t>
             </a:fld>
             <a:endParaRPr lang="en-US" dirty="0"/>
           </a:p>
@@ -15634,7 +15622,7 @@
         <p:spPr>
           <a:xfrm>
             <a:off x="775429" y="1621361"/>
-            <a:ext cx="8368571" cy="1143070"/>
+            <a:ext cx="8368571" cy="2805063"/>
           </a:xfrm>
           <a:prstGeom prst="rect">
             <a:avLst/>
@@ -15682,8 +15670,62 @@
               </a:rPr>
               <a:t>Emotion Recognition</a:t>
             </a:r>
+            <a:endParaRPr lang="en-IN" sz="2400" dirty="0">
+              <a:latin typeface="Söhne"/>
+            </a:endParaRPr>
+          </a:p>
+          <a:p>
+            <a:pPr marL="285750" indent="-285750">
+              <a:lnSpc>
+                <a:spcPct val="150000"/>
+              </a:lnSpc>
+              <a:buFont typeface="Wingdings" panose="05000000000000000000" pitchFamily="2" charset="2"/>
+              <a:buChar char="Ø"/>
+            </a:pPr>
             <a:r>
               <a:rPr lang="en-IN" sz="2400" dirty="0">
+                <a:latin typeface="Söhne"/>
+                <a:ea typeface="Open Sans" panose="020B0604020202020204" pitchFamily="34" charset="0"/>
+                <a:cs typeface="Open Sans" panose="020B0604020202020204" pitchFamily="34" charset="0"/>
+              </a:rPr>
+              <a:t>1</a:t>
+            </a:r>
+          </a:p>
+          <a:p>
+            <a:pPr marL="285750" indent="-285750">
+              <a:lnSpc>
+                <a:spcPct val="150000"/>
+              </a:lnSpc>
+              <a:buFont typeface="Wingdings" panose="05000000000000000000" pitchFamily="2" charset="2"/>
+              <a:buChar char="Ø"/>
+            </a:pPr>
+            <a:r>
+              <a:rPr lang="en-IN" sz="2400" dirty="0">
+                <a:latin typeface="Söhne"/>
+                <a:ea typeface="Open Sans" panose="020B0604020202020204" pitchFamily="34" charset="0"/>
+                <a:cs typeface="Open Sans" panose="020B0604020202020204" pitchFamily="34" charset="0"/>
+              </a:rPr>
+              <a:t>2</a:t>
+            </a:r>
+          </a:p>
+          <a:p>
+            <a:pPr marL="285750" indent="-285750">
+              <a:lnSpc>
+                <a:spcPct val="150000"/>
+              </a:lnSpc>
+              <a:buFont typeface="Wingdings" panose="05000000000000000000" pitchFamily="2" charset="2"/>
+              <a:buChar char="Ø"/>
+            </a:pPr>
+            <a:r>
+              <a:rPr lang="en-IN" sz="2400" dirty="0">
+                <a:latin typeface="Söhne"/>
+                <a:ea typeface="Open Sans" panose="020B0604020202020204" pitchFamily="34" charset="0"/>
+                <a:cs typeface="Open Sans" panose="020B0604020202020204" pitchFamily="34" charset="0"/>
+              </a:rPr>
+              <a:t>3</a:t>
+            </a:r>
+            <a:r>
+              <a:rPr lang="en-IN" sz="2400">
                 <a:latin typeface="Calibri "/>
                 <a:ea typeface="Open Sans" panose="020B0604020202020204" pitchFamily="34" charset="0"/>
                 <a:cs typeface="Open Sans" panose="020B0604020202020204" pitchFamily="34" charset="0"/>
